--- a/Report/NordicFlow_Product_Analytics.pptx
+++ b/Report/NordicFlow_Product_Analytics.pptx
@@ -2571,28 +2571,6 @@
       </p:sp>
       <p:sp>
         <p:nvSpPr>
-          <p:cNvPr id="6" name="Shape 4"/>
-          <p:cNvSpPr/>
-          <p:nvPr/>
-        </p:nvSpPr>
-        <p:spPr>
-          <a:xfrm>
-            <a:off x="548640" y="1965960"/>
-            <a:ext cx="5349240" cy="237744"/>
-          </a:xfrm>
-          <a:prstGeom prst="roundRect">
-            <a:avLst>
-              <a:gd name="adj" fmla="val 30769"/>
-            </a:avLst>
-          </a:prstGeom>
-          <a:solidFill>
-            <a:srgbClr val="EDF2F6"/>
-          </a:solidFill>
-          <a:ln/>
-        </p:spPr>
-      </p:sp>
-      <p:sp>
-        <p:nvSpPr>
           <p:cNvPr id="7" name="Shape 5"/>
           <p:cNvSpPr/>
           <p:nvPr/>
@@ -2607,66 +2585,6 @@
           </a:prstGeom>
           <a:solidFill>
             <a:srgbClr val="EDF2F6"/>
-          </a:solidFill>
-          <a:ln/>
-        </p:spPr>
-      </p:sp>
-      <p:sp>
-        <p:nvSpPr>
-          <p:cNvPr id="8" name="Shape 6"/>
-          <p:cNvSpPr/>
-          <p:nvPr/>
-        </p:nvSpPr>
-        <p:spPr>
-          <a:xfrm>
-            <a:off x="658368" y="2048256"/>
-            <a:ext cx="73152" cy="73152"/>
-          </a:xfrm>
-          <a:prstGeom prst="ellipse">
-            <a:avLst/>
-          </a:prstGeom>
-          <a:solidFill>
-            <a:srgbClr val="E0645B"/>
-          </a:solidFill>
-          <a:ln/>
-        </p:spPr>
-      </p:sp>
-      <p:sp>
-        <p:nvSpPr>
-          <p:cNvPr id="9" name="Shape 7"/>
-          <p:cNvSpPr/>
-          <p:nvPr/>
-        </p:nvSpPr>
-        <p:spPr>
-          <a:xfrm>
-            <a:off x="822960" y="2048256"/>
-            <a:ext cx="73152" cy="73152"/>
-          </a:xfrm>
-          <a:prstGeom prst="ellipse">
-            <a:avLst/>
-          </a:prstGeom>
-          <a:solidFill>
-            <a:srgbClr val="E8B84B"/>
-          </a:solidFill>
-          <a:ln/>
-        </p:spPr>
-      </p:sp>
-      <p:sp>
-        <p:nvSpPr>
-          <p:cNvPr id="10" name="Shape 8"/>
-          <p:cNvSpPr/>
-          <p:nvPr/>
-        </p:nvSpPr>
-        <p:spPr>
-          <a:xfrm>
-            <a:off x="987552" y="2048256"/>
-            <a:ext cx="73152" cy="73152"/>
-          </a:xfrm>
-          <a:prstGeom prst="ellipse">
-            <a:avLst/>
-          </a:prstGeom>
-          <a:solidFill>
-            <a:srgbClr val="5FBE72"/>
           </a:solidFill>
           <a:ln/>
         </p:spPr>
@@ -2790,28 +2708,6 @@
       </p:sp>
       <p:sp>
         <p:nvSpPr>
-          <p:cNvPr id="15" name="Shape 12"/>
-          <p:cNvSpPr/>
-          <p:nvPr/>
-        </p:nvSpPr>
-        <p:spPr>
-          <a:xfrm>
-            <a:off x="6035040" y="1965960"/>
-            <a:ext cx="5349240" cy="237744"/>
-          </a:xfrm>
-          <a:prstGeom prst="roundRect">
-            <a:avLst>
-              <a:gd name="adj" fmla="val 30769"/>
-            </a:avLst>
-          </a:prstGeom>
-          <a:solidFill>
-            <a:srgbClr val="EDF2F6"/>
-          </a:solidFill>
-          <a:ln/>
-        </p:spPr>
-      </p:sp>
-      <p:sp>
-        <p:nvSpPr>
           <p:cNvPr id="16" name="Shape 13"/>
           <p:cNvSpPr/>
           <p:nvPr/>
@@ -2826,66 +2722,6 @@
           </a:prstGeom>
           <a:solidFill>
             <a:srgbClr val="EDF2F6"/>
-          </a:solidFill>
-          <a:ln/>
-        </p:spPr>
-      </p:sp>
-      <p:sp>
-        <p:nvSpPr>
-          <p:cNvPr id="17" name="Shape 14"/>
-          <p:cNvSpPr/>
-          <p:nvPr/>
-        </p:nvSpPr>
-        <p:spPr>
-          <a:xfrm>
-            <a:off x="6144768" y="2048256"/>
-            <a:ext cx="73152" cy="73152"/>
-          </a:xfrm>
-          <a:prstGeom prst="ellipse">
-            <a:avLst/>
-          </a:prstGeom>
-          <a:solidFill>
-            <a:srgbClr val="E0645B"/>
-          </a:solidFill>
-          <a:ln/>
-        </p:spPr>
-      </p:sp>
-      <p:sp>
-        <p:nvSpPr>
-          <p:cNvPr id="18" name="Shape 15"/>
-          <p:cNvSpPr/>
-          <p:nvPr/>
-        </p:nvSpPr>
-        <p:spPr>
-          <a:xfrm>
-            <a:off x="6309360" y="2048256"/>
-            <a:ext cx="73152" cy="73152"/>
-          </a:xfrm>
-          <a:prstGeom prst="ellipse">
-            <a:avLst/>
-          </a:prstGeom>
-          <a:solidFill>
-            <a:srgbClr val="E8B84B"/>
-          </a:solidFill>
-          <a:ln/>
-        </p:spPr>
-      </p:sp>
-      <p:sp>
-        <p:nvSpPr>
-          <p:cNvPr id="19" name="Shape 16"/>
-          <p:cNvSpPr/>
-          <p:nvPr/>
-        </p:nvSpPr>
-        <p:spPr>
-          <a:xfrm>
-            <a:off x="6473952" y="2048256"/>
-            <a:ext cx="73152" cy="73152"/>
-          </a:xfrm>
-          <a:prstGeom prst="ellipse">
-            <a:avLst/>
-          </a:prstGeom>
-          <a:solidFill>
-            <a:srgbClr val="5FBE72"/>
           </a:solidFill>
           <a:ln/>
         </p:spPr>
@@ -3050,17 +2886,6 @@
             <a:pPr marL="0" indent="0" algn="l">
               <a:buNone/>
             </a:pPr>
-            <a:r>
-              <a:rPr lang="en-US" sz="900" dirty="0">
-                <a:solidFill>
-                  <a:srgbClr val="9AAAB8"/>
-                </a:solidFill>
-                <a:latin typeface="Calibri" pitchFamily="34" charset="0"/>
-                <a:ea typeface="Calibri" pitchFamily="34" charset="-122"/>
-                <a:cs typeface="Calibri" pitchFamily="34" charset="-120"/>
-              </a:rPr>
-              <a:t>SQL Server / MySQL query results, SQL_queries.sql</a:t>
-            </a:r>
             <a:endParaRPr lang="en-US" sz="900" dirty="0"/>
           </a:p>
         </p:txBody>
@@ -12535,8 +12360,8 @@
         </p:nvSpPr>
         <p:spPr>
           <a:xfrm>
-            <a:off x="969264" y="3374136"/>
-            <a:ext cx="2048256" cy="777240"/>
+            <a:off x="969264" y="2862072"/>
+            <a:ext cx="2048256" cy="1289304"/>
           </a:xfrm>
           <a:prstGeom prst="rect">
             <a:avLst/>
@@ -12597,8 +12422,8 @@
         </p:nvSpPr>
         <p:spPr>
           <a:xfrm>
-            <a:off x="969264" y="4160520"/>
-            <a:ext cx="2048256" cy="777240"/>
+            <a:off x="969264" y="3810000"/>
+            <a:ext cx="2048256" cy="1127760"/>
           </a:xfrm>
           <a:prstGeom prst="rect">
             <a:avLst/>
@@ -12659,8 +12484,8 @@
         </p:nvSpPr>
         <p:spPr>
           <a:xfrm>
-            <a:off x="969264" y="4946904"/>
-            <a:ext cx="2048256" cy="777240"/>
+            <a:off x="969264" y="4596384"/>
+            <a:ext cx="2048256" cy="1127760"/>
           </a:xfrm>
           <a:prstGeom prst="rect">
             <a:avLst/>
@@ -12855,8 +12680,8 @@
         </p:nvSpPr>
         <p:spPr>
           <a:xfrm>
-            <a:off x="3840480" y="3374136"/>
-            <a:ext cx="2048256" cy="777240"/>
+            <a:off x="3822192" y="2962656"/>
+            <a:ext cx="2048256" cy="1103376"/>
           </a:xfrm>
           <a:prstGeom prst="rect">
             <a:avLst/>
@@ -12917,8 +12742,8 @@
         </p:nvSpPr>
         <p:spPr>
           <a:xfrm>
-            <a:off x="3840480" y="4160520"/>
-            <a:ext cx="2048256" cy="777240"/>
+            <a:off x="3840480" y="3810000"/>
+            <a:ext cx="2048256" cy="1127760"/>
           </a:xfrm>
           <a:prstGeom prst="rect">
             <a:avLst/>
@@ -12979,8 +12804,8 @@
         </p:nvSpPr>
         <p:spPr>
           <a:xfrm>
-            <a:off x="3840480" y="4946904"/>
-            <a:ext cx="2048256" cy="777240"/>
+            <a:off x="3840480" y="4620768"/>
+            <a:ext cx="2048256" cy="1103376"/>
           </a:xfrm>
           <a:prstGeom prst="rect">
             <a:avLst/>
@@ -13175,8 +13000,8 @@
         </p:nvSpPr>
         <p:spPr>
           <a:xfrm>
-            <a:off x="6711696" y="3374136"/>
-            <a:ext cx="2048256" cy="777240"/>
+            <a:off x="6711696" y="3048000"/>
+            <a:ext cx="2048256" cy="1103376"/>
           </a:xfrm>
           <a:prstGeom prst="rect">
             <a:avLst/>
@@ -13237,8 +13062,8 @@
         </p:nvSpPr>
         <p:spPr>
           <a:xfrm>
-            <a:off x="6711696" y="4160520"/>
-            <a:ext cx="2048256" cy="777240"/>
+            <a:off x="6711696" y="3898392"/>
+            <a:ext cx="2048256" cy="1039368"/>
           </a:xfrm>
           <a:prstGeom prst="rect">
             <a:avLst/>
@@ -13299,8 +13124,8 @@
         </p:nvSpPr>
         <p:spPr>
           <a:xfrm>
-            <a:off x="6711696" y="4946904"/>
-            <a:ext cx="2048256" cy="777240"/>
+            <a:off x="6711696" y="4620768"/>
+            <a:ext cx="2048256" cy="1103376"/>
           </a:xfrm>
           <a:prstGeom prst="rect">
             <a:avLst/>
@@ -13626,8 +13451,8 @@
         </p:nvSpPr>
         <p:spPr>
           <a:xfrm>
-            <a:off x="9564624" y="4779264"/>
-            <a:ext cx="2066544" cy="944880"/>
+            <a:off x="9564624" y="4596384"/>
+            <a:ext cx="2066544" cy="1127760"/>
           </a:xfrm>
           <a:prstGeom prst="rect">
             <a:avLst/>
@@ -14749,28 +14574,6 @@
       </p:sp>
       <p:sp>
         <p:nvSpPr>
-          <p:cNvPr id="6" name="Shape 4"/>
-          <p:cNvSpPr/>
-          <p:nvPr/>
-        </p:nvSpPr>
-        <p:spPr>
-          <a:xfrm>
-            <a:off x="548640" y="1965960"/>
-            <a:ext cx="3566160" cy="237744"/>
-          </a:xfrm>
-          <a:prstGeom prst="roundRect">
-            <a:avLst>
-              <a:gd name="adj" fmla="val 30769"/>
-            </a:avLst>
-          </a:prstGeom>
-          <a:solidFill>
-            <a:srgbClr val="EDF2F6"/>
-          </a:solidFill>
-          <a:ln/>
-        </p:spPr>
-      </p:sp>
-      <p:sp>
-        <p:nvSpPr>
           <p:cNvPr id="7" name="Shape 5"/>
           <p:cNvSpPr/>
           <p:nvPr/>
@@ -14785,66 +14588,6 @@
           </a:prstGeom>
           <a:solidFill>
             <a:srgbClr val="EDF2F6"/>
-          </a:solidFill>
-          <a:ln/>
-        </p:spPr>
-      </p:sp>
-      <p:sp>
-        <p:nvSpPr>
-          <p:cNvPr id="8" name="Shape 6"/>
-          <p:cNvSpPr/>
-          <p:nvPr/>
-        </p:nvSpPr>
-        <p:spPr>
-          <a:xfrm>
-            <a:off x="658368" y="2048256"/>
-            <a:ext cx="73152" cy="73152"/>
-          </a:xfrm>
-          <a:prstGeom prst="ellipse">
-            <a:avLst/>
-          </a:prstGeom>
-          <a:solidFill>
-            <a:srgbClr val="E0645B"/>
-          </a:solidFill>
-          <a:ln/>
-        </p:spPr>
-      </p:sp>
-      <p:sp>
-        <p:nvSpPr>
-          <p:cNvPr id="9" name="Shape 7"/>
-          <p:cNvSpPr/>
-          <p:nvPr/>
-        </p:nvSpPr>
-        <p:spPr>
-          <a:xfrm>
-            <a:off x="822960" y="2048256"/>
-            <a:ext cx="73152" cy="73152"/>
-          </a:xfrm>
-          <a:prstGeom prst="ellipse">
-            <a:avLst/>
-          </a:prstGeom>
-          <a:solidFill>
-            <a:srgbClr val="E8B84B"/>
-          </a:solidFill>
-          <a:ln/>
-        </p:spPr>
-      </p:sp>
-      <p:sp>
-        <p:nvSpPr>
-          <p:cNvPr id="10" name="Shape 8"/>
-          <p:cNvSpPr/>
-          <p:nvPr/>
-        </p:nvSpPr>
-        <p:spPr>
-          <a:xfrm>
-            <a:off x="987552" y="2048256"/>
-            <a:ext cx="73152" cy="73152"/>
-          </a:xfrm>
-          <a:prstGeom prst="ellipse">
-            <a:avLst/>
-          </a:prstGeom>
-          <a:solidFill>
-            <a:srgbClr val="5FBE72"/>
           </a:solidFill>
           <a:ln/>
         </p:spPr>
@@ -14974,7 +14717,7 @@
         </p:nvSpPr>
         <p:spPr>
           <a:xfrm>
-            <a:off x="4343400" y="1965960"/>
+            <a:off x="4175072" y="1986018"/>
             <a:ext cx="3401568" cy="237744"/>
           </a:xfrm>
           <a:prstGeom prst="roundRect">
@@ -15004,66 +14747,6 @@
           </a:prstGeom>
           <a:solidFill>
             <a:srgbClr val="EDF2F6"/>
-          </a:solidFill>
-          <a:ln/>
-        </p:spPr>
-      </p:sp>
-      <p:sp>
-        <p:nvSpPr>
-          <p:cNvPr id="17" name="Shape 14"/>
-          <p:cNvSpPr/>
-          <p:nvPr/>
-        </p:nvSpPr>
-        <p:spPr>
-          <a:xfrm>
-            <a:off x="4453128" y="2048256"/>
-            <a:ext cx="73152" cy="73152"/>
-          </a:xfrm>
-          <a:prstGeom prst="ellipse">
-            <a:avLst/>
-          </a:prstGeom>
-          <a:solidFill>
-            <a:srgbClr val="E0645B"/>
-          </a:solidFill>
-          <a:ln/>
-        </p:spPr>
-      </p:sp>
-      <p:sp>
-        <p:nvSpPr>
-          <p:cNvPr id="18" name="Shape 15"/>
-          <p:cNvSpPr/>
-          <p:nvPr/>
-        </p:nvSpPr>
-        <p:spPr>
-          <a:xfrm>
-            <a:off x="4617720" y="2048256"/>
-            <a:ext cx="73152" cy="73152"/>
-          </a:xfrm>
-          <a:prstGeom prst="ellipse">
-            <a:avLst/>
-          </a:prstGeom>
-          <a:solidFill>
-            <a:srgbClr val="E8B84B"/>
-          </a:solidFill>
-          <a:ln/>
-        </p:spPr>
-      </p:sp>
-      <p:sp>
-        <p:nvSpPr>
-          <p:cNvPr id="19" name="Shape 16"/>
-          <p:cNvSpPr/>
-          <p:nvPr/>
-        </p:nvSpPr>
-        <p:spPr>
-          <a:xfrm>
-            <a:off x="4782312" y="2048256"/>
-            <a:ext cx="73152" cy="73152"/>
-          </a:xfrm>
-          <a:prstGeom prst="ellipse">
-            <a:avLst/>
-          </a:prstGeom>
-          <a:solidFill>
-            <a:srgbClr val="5FBE72"/>
           </a:solidFill>
           <a:ln/>
         </p:spPr>
@@ -15223,66 +14906,6 @@
           </a:prstGeom>
           <a:solidFill>
             <a:srgbClr val="EDF2F6"/>
-          </a:solidFill>
-          <a:ln/>
-        </p:spPr>
-      </p:sp>
-      <p:sp>
-        <p:nvSpPr>
-          <p:cNvPr id="26" name="Shape 22"/>
-          <p:cNvSpPr/>
-          <p:nvPr/>
-        </p:nvSpPr>
-        <p:spPr>
-          <a:xfrm>
-            <a:off x="8083296" y="2048256"/>
-            <a:ext cx="73152" cy="73152"/>
-          </a:xfrm>
-          <a:prstGeom prst="ellipse">
-            <a:avLst/>
-          </a:prstGeom>
-          <a:solidFill>
-            <a:srgbClr val="E0645B"/>
-          </a:solidFill>
-          <a:ln/>
-        </p:spPr>
-      </p:sp>
-      <p:sp>
-        <p:nvSpPr>
-          <p:cNvPr id="27" name="Shape 23"/>
-          <p:cNvSpPr/>
-          <p:nvPr/>
-        </p:nvSpPr>
-        <p:spPr>
-          <a:xfrm>
-            <a:off x="8247888" y="2048256"/>
-            <a:ext cx="73152" cy="73152"/>
-          </a:xfrm>
-          <a:prstGeom prst="ellipse">
-            <a:avLst/>
-          </a:prstGeom>
-          <a:solidFill>
-            <a:srgbClr val="E8B84B"/>
-          </a:solidFill>
-          <a:ln/>
-        </p:spPr>
-      </p:sp>
-      <p:sp>
-        <p:nvSpPr>
-          <p:cNvPr id="28" name="Shape 24"/>
-          <p:cNvSpPr/>
-          <p:nvPr/>
-        </p:nvSpPr>
-        <p:spPr>
-          <a:xfrm>
-            <a:off x="8412480" y="2048256"/>
-            <a:ext cx="73152" cy="73152"/>
-          </a:xfrm>
-          <a:prstGeom prst="ellipse">
-            <a:avLst/>
-          </a:prstGeom>
-          <a:solidFill>
-            <a:srgbClr val="5FBE72"/>
           </a:solidFill>
           <a:ln/>
         </p:spPr>
